--- a/Lessons/07_trees_and_ensembles/Slides/trees_and_ensembles_slides.pptx
+++ b/Lessons/07_trees_and_ensembles/Slides/trees_and_ensembles_slides.pptx
@@ -802,7 +802,7 @@
             </a:pPr>
             <a:r>
               <a:rPr/>
-              <a:t>nL and nR are the sizes of the two children, n = nL + nR. Read it as: what the parent’s impurity was, minus what is left after the split, weighted by how the group was divided. The tree keeps whichever candidate split makes Δ G largest.</a:t>
+              <a:t>mL and mR are the sizes of the two children, mP = mL + mR. Read it as: what the parent’s impurity was, minus what is left after the split, weighted by how the group was divided. The tree keeps whichever candidate split makes Δ G largest.</a:t>
             </a:r>
           </a:p>
           <a:p>
@@ -9465,7 +9465,7 @@
       </p:sp>
       <p:pic>
         <p:nvPicPr>
-          <p:cNvPr descr="eq_cf12059d7e.png" id="0" name="Picture 1"/>
+          <p:cNvPr descr="eq_77488865aa.png" id="0" name="Picture 1"/>
           <p:cNvPicPr>
             <a:picLocks noGrp="1" noChangeAspect="1"/>
           </p:cNvPicPr>
@@ -9479,8 +9479,8 @@
         </p:blipFill>
         <p:spPr bwMode="auto">
           <a:xfrm>
-            <a:off x="457200" y="2560439"/>
-            <a:ext cx="8229600" cy="571500"/>
+            <a:off x="457200" y="2547739"/>
+            <a:ext cx="8229600" cy="596900"/>
           </a:xfrm>
           <a:prstGeom prst="rect">
             <a:avLst/>

--- a/Lessons/07_trees_and_ensembles/Slides/trees_and_ensembles_slides.pptx
+++ b/Lessons/07_trees_and_ensembles/Slides/trees_and_ensembles_slides.pptx
@@ -10590,8 +10590,8 @@
         </p:blipFill>
         <p:spPr bwMode="auto">
           <a:xfrm>
-            <a:off x="2136813" y="1166099"/>
-            <a:ext cx="4870374" cy="3360181"/>
+            <a:off x="2130520" y="1166099"/>
+            <a:ext cx="4882959" cy="3360181"/>
           </a:xfrm>
           <a:prstGeom prst="rect">
             <a:avLst/>

--- a/Lessons/07_trees_and_ensembles/Slides/trees_and_ensembles_slides.pptx
+++ b/Lessons/07_trees_and_ensembles/Slides/trees_and_ensembles_slides.pptx
@@ -574,7 +574,7 @@
             </a:pPr>
             <a:r>
               <a:rPr/>
-              <a:t>Say what changes and what doesn’t. Lessons 3 and 4 fit a line. Lesson 6 offered three ways of bending a boundary a line cannot draw. Today adds a fourth primitive — a threshold, not a distance or an inner product — and then spends most of the three hours on a different question: not “does a tree work”, but “what happens when you build more than one”.</a:t>
+              <a:t>Say what changes and what doesn’t. Lessons 3 and 4 fit a line. Lesson 6 offered three ways of bending a boundary a line cannot draw. Today adds a fourth primitive - a threshold, not a distance or an inner product - and then spends most of the three hours on a different question: not “does a tree work”, but “what happens when you build more than one”.</a:t>
             </a:r>
           </a:p>
           <a:p>
@@ -706,7 +706,7 @@
             </a:r>
             <a:r>
               <a:rPr/>
-              <a:t> weight by group size — the answer is that a tree would happily carve off tiny, perfectly pure single-point groups at every step, which is exactly the overfitting behaviour section 3 measures in a few minutes.</a:t>
+              <a:t> weight by group size - the answer is that a tree would happily carve off tiny, perfectly pure single-point groups at every step, which is exactly the overfitting behaviour section 3 measures in a few minutes.</a:t>
             </a:r>
           </a:p>
           <a:p>
@@ -816,7 +816,7 @@
             </a:pPr>
             <a:r>
               <a:rPr/>
-              <a:t>No derivation needed here — the formula is exactly the weighted comparison the previous slide described in words. Handout section 2.2 has it worked through on the loan data’s actual root split.</a:t>
+              <a:t>No derivation needed here - the formula is exactly the weighted comparison the previous slide described in words. Handout section 2.2 has it worked through on the loan data’s actual root split.</a:t>
             </a:r>
           </a:p>
         </p:txBody>
@@ -912,7 +912,7 @@
             </a:pPr>
             <a:r>
               <a:rPr/>
-              <a:t>The last bullet is the one to slow down on. A feature that only helps in combination with a second split further down the tree can be — and in this dataset’s two interior islands, is — invisible to a shallow search, because Δ G is never evaluated for two splits together.</a:t>
+              <a:t>The last bullet is the one to slow down on. A feature that only helps in combination with a second split further down the tree can be - and in this dataset’s two interior islands, is - invisible to a shallow search, because Δ G is never evaluated for two splits together.</a:t>
             </a:r>
           </a:p>
           <a:p>
@@ -1022,7 +1022,7 @@
             </a:pPr>
             <a:r>
               <a:rPr/>
-              <a:t>Ask the room why finding the debt ceiling by blind search, with no knowledge of how the data was built, is a stronger check than it might first appear — the answer is that it rules out the split being an artefact of how the search was coded, since nothing in the algorithm knows the generating rule.</a:t>
+              <a:t>Ask the room why finding the debt ceiling by blind search, with no knowledge of how the data was built, is a stronger check than it might first appear - the answer is that it rules out the split being an artefact of how the search was coded, since nothing in the algorithm knows the generating rule.</a:t>
             </a:r>
           </a:p>
           <a:p>
@@ -1118,7 +1118,7 @@
             </a:pPr>
             <a:r>
               <a:rPr/>
-              <a:t>This is the check notebook 1 runs live, and it matters for trust rather than for novelty: once the from-scratch version is shown to agree with scikit-learn exactly, every later result in the lesson — obtained with scikit-learn — inherits that confidence.</a:t>
+              <a:t>This is the check notebook 1 runs live, and it matters for trust rather than for novelty: once the from-scratch version is shown to agree with scikit-learn exactly, every later result in the lesson - obtained with scikit-learn - inherits that confidence.</a:t>
             </a:r>
           </a:p>
           <a:p>
@@ -1250,7 +1250,7 @@
             </a:pPr>
             <a:r>
               <a:rPr/>
-              <a:t>The honest answer is that a shallow tree simply cannot see them — not because the information isn’t there, but because greedy search only ever commits to the best split available at each individual step. Depth is what buys the tree enough steps to eventually stumble onto them, which is exactly where the next segment goes.</a:t>
+              <a:t>The honest answer is that a shallow tree simply cannot see them - not because the information isn’t there, but because greedy search only ever commits to the best split available at each individual step. Depth is what buys the tree enough steps to eventually stumble onto them, which is exactly where the next segment goes.</a:t>
             </a:r>
           </a:p>
           <a:p>
@@ -1360,7 +1360,7 @@
             </a:pPr>
             <a:r>
               <a:rPr/>
-              <a:t>The training-accuracy-1.000 claim is the one to make them justify. Ask why an unconstrained tree gets every training point right, always, on any data — the answer is that splitting never has to stop until every leaf holds one example, which it then “predicts” perfectly by definition. That number demonstrates the model class can memorise, not that anything has been learned — the same reading lesson 6 gave k = 1’s training accuracy.</a:t>
+              <a:t>The training-accuracy-1.000 claim is the one to make them justify. Ask why an unconstrained tree gets every training point right, always, on any data - the answer is that splitting never has to stop until every leaf holds one example, which it then “predicts” perfectly by definition. That number demonstrates the model class can memorise, not that anything has been learned - the same reading lesson 6 gave k = 1’s training accuracy.</a:t>
             </a:r>
           </a:p>
           <a:p>
@@ -1456,7 +1456,7 @@
             </a:pPr>
             <a:r>
               <a:rPr/>
-              <a:t>Read the two columns against each other, never in isolation, exactly as lesson 5 taught. Training accuracy climbs monotonically towards 1.000. Cross-validated accuracy rises, peaks at depth 8, and then falls back — even though the model keeps getting strictly more flexible.</a:t>
+              <a:t>Read the two columns against each other, never in isolation, exactly as lesson 5 taught. Training accuracy climbs monotonically towards 1.000. Cross-validated accuracy rises, peaks at depth 8, and then falls back - even though the model keeps getting strictly more flexible.</a:t>
             </a:r>
           </a:p>
           <a:p>
@@ -1602,7 +1602,7 @@
             </a:pPr>
             <a:r>
               <a:rPr/>
-              <a:t>This is the second time this course has shown a curve bend this way — lesson 3’s Lasso penalty was the first. Handout section 3.</a:t>
+              <a:t>This is the second time this course has shown a curve bend this way - lesson 3’s Lasso penalty was the first. Handout section 3.</a:t>
             </a:r>
           </a:p>
         </p:txBody>
@@ -1684,7 +1684,7 @@
             </a:pPr>
             <a:r>
               <a:rPr/>
-              <a:t>Left to right: at depth 2 the tree affords only the income floor and the debt ceiling — the two biggest, easiest-to-find regions — and neither interior island is visible at all. At depth 8 both islands appear as clean rectangles, close to the rule that generated the data. At full depth the boundary has grown a fringe of tiny rectangles chasing individual flipped labels.</a:t>
+              <a:t>Left to right: at depth 2 the tree affords only the income floor and the debt ceiling - the two biggest, easiest-to-find regions - and neither interior island is visible at all. At depth 8 both islands appear as clean rectangles, close to the rule that generated the data. At full depth the boundary has grown a fringe of tiny rectangles chasing individual flipped labels.</a:t>
             </a:r>
           </a:p>
           <a:p>
@@ -1794,21 +1794,21 @@
             </a:pPr>
             <a:r>
               <a:rPr/>
-              <a:t>Hand back exercise 6 quickly — a sentence on what the class did well (most picked a defensible family) and a sentence on the common gap (several reports quoted a cross-validated score without ever checking whether the model’s assumption, such as within-class independence, actually held on that data).</a:t>
-            </a:r>
-          </a:p>
-          <a:p>
-            <a:pPr lvl="0" indent="0" marL="0">
-              <a:buNone/>
-            </a:pPr>
-          </a:p>
-          <a:p>
-            <a:pPr lvl="0" indent="0" marL="0">
-              <a:buNone/>
-            </a:pPr>
-            <a:r>
-              <a:rPr/>
-              <a:t>Link forward explicitly: today introduces a family with its own convenient assumption — that the columns you feed a random forest are all worth listening to — and by the end of the lesson you will have measured exactly how badly that assumption can fail.</a:t>
+              <a:t>Hand back exercise 6 quickly - a sentence on what the class did well (most picked a defensible family) and a sentence on the common gap (several reports quoted a cross-validated score without ever checking whether the model’s assumption, such as within-class independence, actually held on that data).</a:t>
+            </a:r>
+          </a:p>
+          <a:p>
+            <a:pPr lvl="0" indent="0" marL="0">
+              <a:buNone/>
+            </a:pPr>
+          </a:p>
+          <a:p>
+            <a:pPr lvl="0" indent="0" marL="0">
+              <a:buNone/>
+            </a:pPr>
+            <a:r>
+              <a:rPr/>
+              <a:t>Link forward explicitly: today introduces a family with its own convenient assumption - that the columns you feed a random forest are all worth listening to - and by the end of the lesson you will have measured exactly how badly that assumption can fail.</a:t>
             </a:r>
           </a:p>
         </p:txBody>
@@ -1904,7 +1904,7 @@
             </a:pPr>
             <a:r>
               <a:rPr/>
-              <a:t>The nine-leaf tree is worth reading aloud as a sequence of if/else statements — that is the entire model, and it is the thing k-nearest neighbours and support vector machines cannot offer at all. For a decision that has to be justified to the person it affects, that can matter as much as accuracy.</a:t>
+              <a:t>The nine-leaf tree is worth reading aloud as a sequence of if/else statements - that is the entire model, and it is the thing k-nearest neighbours and support vector machines cannot offer at all. For a decision that has to be justified to the person it affects, that can matter as much as accuracy.</a:t>
             </a:r>
           </a:p>
           <a:p>
@@ -2000,7 +2000,7 @@
             </a:pPr>
             <a:r>
               <a:rPr/>
-              <a:t>This is the instability that ensembles turn into raw material. The strongest split barely moves under resampling, because the evidence behind it — 1,200 points supporting the debt ceiling — is overwhelming. Everything weaker than that is supported by far fewer points, and those splits are what actually determine a tree’s shape.</a:t>
+              <a:t>This is the instability that ensembles turn into raw material. The strongest split barely moves under resampling, because the evidence behind it - 1,200 points supporting the debt ceiling - is overwhelming. Everything weaker than that is supported by far fewer points, and those splits are what actually determine a tree’s shape.</a:t>
             </a:r>
           </a:p>
           <a:p>
@@ -2124,7 +2124,7 @@
             </a:pPr>
             <a:r>
               <a:rPr/>
-              <a:t>Have them watch the from-scratch implementation confirm the debt-ceiling root split before scikit-learn’s version ever runs — the point is that the agreement is not assumed, it is checked, at every depth.</a:t>
+              <a:t>Have them watch the from-scratch implementation confirm the debt-ceiling root split before scikit-learn’s version ever runs - the point is that the agreement is not assumed, it is checked, at every depth.</a:t>
             </a:r>
           </a:p>
           <a:p>
@@ -2220,7 +2220,7 @@
             </a:pPr>
             <a:r>
               <a:rPr/>
-              <a:t>Twelve minutes. The next segment is where the lesson’s real content starts — one tree’s instability, turned into an ensemble’s strength — so they need to come back with that framing fresh.</a:t>
+              <a:t>Twelve minutes. The next segment is where the lesson’s real content starts - one tree’s instability, turned into an ensemble’s strength - so they need to come back with that framing fresh.</a:t>
             </a:r>
           </a:p>
         </p:txBody>
@@ -2302,21 +2302,21 @@
             </a:pPr>
             <a:r>
               <a:rPr/>
-              <a:t>State the logic before the name. Section 4 just measured that two trees on overlapping resamples disagree on more than a tenth of predictions. If those disagreements are close to random, averaging many such trees should cancel some of them out — that is the entire idea behind bagging, bootstrap aggregating.</a:t>
-            </a:r>
-          </a:p>
-          <a:p>
-            <a:pPr lvl="0" indent="0" marL="0">
-              <a:buNone/>
-            </a:pPr>
-          </a:p>
-          <a:p>
-            <a:pPr lvl="0" indent="0" marL="0">
-              <a:buNone/>
-            </a:pPr>
-            <a:r>
-              <a:rPr/>
-              <a:t>Be precise about “with replacement”: some rows appear more than once in a given sample, some not at all. That leftover fraction is not wasted — it becomes free validation data, on the next slide.</a:t>
+              <a:t>State the logic before the name. Section 4 just measured that two trees on overlapping resamples disagree on more than a tenth of predictions. If those disagreements are close to random, averaging many such trees should cancel some of them out - that is the entire idea behind bagging, bootstrap aggregating.</a:t>
+            </a:r>
+          </a:p>
+          <a:p>
+            <a:pPr lvl="0" indent="0" marL="0">
+              <a:buNone/>
+            </a:pPr>
+          </a:p>
+          <a:p>
+            <a:pPr lvl="0" indent="0" marL="0">
+              <a:buNone/>
+            </a:pPr>
+            <a:r>
+              <a:rPr/>
+              <a:t>Be precise about “with replacement”: some rows appear more than once in a given sample, some not at all. That leftover fraction is not wasted - it becomes free validation data, on the next slide.</a:t>
             </a:r>
           </a:p>
           <a:p>
@@ -2412,7 +2412,7 @@
             </a:pPr>
             <a:r>
               <a:rPr/>
-              <a:t>State the result, do not derive it — the limit that gives 63.2%/36.8% is a standard exponential limit, worked out in full in the handout, and it does not belong on a slide. What matters here is the consequence: every bootstrap tree automatically leaves out over a third of the data it never saw, for free.</a:t>
+              <a:t>State the result, do not derive it - the limit that gives 63.2%/36.8% is a standard exponential limit, worked out in full in the handout, and it does not belong on a slide. What matters here is the consequence: every bootstrap tree automatically leaves out over a third of the data it never saw, for free.</a:t>
             </a:r>
           </a:p>
           <a:p>
@@ -2530,7 +2530,7 @@
             </a:r>
             <a:r>
               <a:rPr/>
-              <a:t> cross-validation with different bookkeeping — each tree supplying its own held-out fold, the rows it never bootstrapped, instead of the dataset being split up front.</a:t>
+              <a:t> cross-validation with different bookkeeping - each tree supplying its own held-out fold, the rows it never bootstrapped, instead of the dataset being split up front.</a:t>
             </a:r>
           </a:p>
           <a:p>
@@ -2566,7 +2566,7 @@
             </a:pPr>
             <a:r>
               <a:rPr/>
-              <a:t>Then make the practical consequence explicit: with a bagged ensemble you get a trustworthy estimate of generalisation for free, without setting aside a separate validation set at all — just not one to read to the fourth decimal.</a:t>
+              <a:t>Then make the practical consequence explicit: with a bagged ensemble you get a trustworthy estimate of generalisation for free, without setting aside a separate validation set at all - just not one to read to the fourth decimal.</a:t>
             </a:r>
           </a:p>
           <a:p>
@@ -2662,7 +2662,7 @@
             </a:pPr>
             <a:r>
               <a:rPr/>
-              <a:t>State the headline, not the algebra — the covariance expansion behind this is in the handout, and it does not belong on a slide. The two consequences are what matter: there is a floor variance cannot fall below, set by how correlated the trees are with each other, and averaging is a variance tool only, powerless against a systematic mistake shared by every tree.</a:t>
+              <a:t>State the headline, not the algebra - the covariance expansion behind this is in the handout, and it does not belong on a slide. The two consequences are what matter: there is a floor variance cannot fall below, set by how correlated the trees are with each other, and averaging is a variance tool only, powerless against a systematic mistake shared by every tree.</a:t>
             </a:r>
           </a:p>
           <a:p>
@@ -2786,7 +2786,7 @@
             </a:pPr>
             <a:r>
               <a:rPr/>
-              <a:t>Ask the room to name which of the two changes matters more for trusting a single deployed model — the tighter spread, because it means the number you report is less likely to be a lucky split.</a:t>
+              <a:t>Ask the room to name which of the two changes matters more for trusting a single deployed model - the tighter spread, because it means the number you report is less likely to be a lucky split.</a:t>
             </a:r>
           </a:p>
           <a:p>
@@ -3006,7 +3006,7 @@
             </a:pPr>
             <a:r>
               <a:rPr/>
-              <a:t>Ask the room what shape that logic implies before you show the scatter. The useful answer is: not one connected region, so no single straight line can separate the classes — a different failure from lesson 6’s disc-in-a-ring, but a failure of the same kind.</a:t>
+              <a:t>Ask the room what shape that logic implies before you show the scatter. The useful answer is: not one connected region, so no single straight line can separate the classes - a different failure from lesson 6’s disc-in-a-ring, but a failure of the same kind.</a:t>
             </a:r>
           </a:p>
           <a:p>
@@ -3102,21 +3102,21 @@
             </a:pPr>
             <a:r>
               <a:rPr/>
-              <a:t>Same 30 splits as the bagging comparison. The random forest beats plain bagging on both counts — a better mean and a tighter spread — consistent with ρ having fallen further, exactly as the restriction on the previous slide predicts.</a:t>
-            </a:r>
-          </a:p>
-          <a:p>
-            <a:pPr lvl="0" indent="0" marL="0">
-              <a:buNone/>
-            </a:pPr>
-          </a:p>
-          <a:p>
-            <a:pPr lvl="0" indent="0" marL="0">
-              <a:buNone/>
-            </a:pPr>
-            <a:r>
-              <a:rPr/>
-              <a:t>Say plainly what has and hasn’t changed: nothing about the splitting rule is different from section 2. The only change across all three rows of this table is what surrounds the tree — resampling, then also restricting the feature menu.</a:t>
+              <a:t>Same 30 splits as the bagging comparison. The random forest beats plain bagging on both counts - a better mean and a tighter spread - consistent with ρ having fallen further, exactly as the restriction on the previous slide predicts.</a:t>
+            </a:r>
+          </a:p>
+          <a:p>
+            <a:pPr lvl="0" indent="0" marL="0">
+              <a:buNone/>
+            </a:pPr>
+          </a:p>
+          <a:p>
+            <a:pPr lvl="0" indent="0" marL="0">
+              <a:buNone/>
+            </a:pPr>
+            <a:r>
+              <a:rPr/>
+              <a:t>Say plainly what has and hasn’t changed: nothing about the splitting rule is different from section 2. The only change across all three rows of this table is what surrounds the tree - resampling, then also restricting the feature menu.</a:t>
             </a:r>
           </a:p>
           <a:p>
@@ -3212,21 +3212,21 @@
             </a:pPr>
             <a:r>
               <a:rPr/>
-              <a:t>State the definition plainly, then set up the experiment. With just income and debt ratio in the dataset, feature importance is a clean, correct answer — both real features get essentially all the credit, because there is nothing else to compete with them.</a:t>
-            </a:r>
-          </a:p>
-          <a:p>
-            <a:pPr lvl="0" indent="0" marL="0">
-              <a:buNone/>
-            </a:pPr>
-          </a:p>
-          <a:p>
-            <a:pPr lvl="0" indent="0" marL="0">
-              <a:buNone/>
-            </a:pPr>
-            <a:r>
-              <a:rPr/>
-              <a:t>Ask the room to predict what happens as you add columns of pure noise — </a:t>
+              <a:t>State the definition plainly, then set up the experiment. With just income and debt ratio in the dataset, feature importance is a clean, correct answer - both real features get essentially all the credit, because there is nothing else to compete with them.</a:t>
+            </a:r>
+          </a:p>
+          <a:p>
+            <a:pPr lvl="0" indent="0" marL="0">
+              <a:buNone/>
+            </a:pPr>
+          </a:p>
+          <a:p>
+            <a:pPr lvl="0" indent="0" marL="0">
+              <a:buNone/>
+            </a:pPr>
+            <a:r>
+              <a:rPr/>
+              <a:t>Ask the room to predict what happens as you add columns of pure noise - </a:t>
             </a:r>
             <a:r>
               <a:rPr>
@@ -3236,7 +3236,7 @@
             </a:r>
             <a:r>
               <a:rPr/>
-              <a:t>, wired to nothing. Most will predict the noise columns get close to zero importance, because averaging over hundreds of trees should wash out anything with no signal. Do not confirm or deny yet — the next slide is the answer.</a:t>
+              <a:t>, wired to nothing. Most will predict the noise columns get close to zero importance, because averaging over hundreds of trees should wash out anything with no signal. Do not confirm or deny yet - the next slide is the answer.</a:t>
             </a:r>
           </a:p>
           <a:p>
@@ -3356,7 +3356,7 @@
             </a:pPr>
             <a:r>
               <a:rPr/>
-              <a:t>Name the instinct this breaks, and defend it before moving on: expecting an average over hundreds of trees to wash out noise is entirely reasonable — the variance-reduction result from section 5.2 is real and measured, and it does point the same way. It reduces the variance of the </a:t>
+              <a:t>Name the instinct this breaks, and defend it before moving on: expecting an average over hundreds of trees to wash out noise is entirely reasonable - the variance-reduction result from section 5.2 is real and measured, and it does point the same way. It reduces the variance of the </a:t>
             </a:r>
             <a:r>
               <a:rPr i="1"/>
@@ -3364,7 +3364,7 @@
             </a:r>
             <a:r>
               <a:rPr/>
-              <a:t>. It does not guarantee small importance for irrelevant columns, because the very restriction that decorrelates the trees — a random, incomplete menu at each split — is what occasionally hands a split to noise with nothing better on offer.</a:t>
+              <a:t>. It does not guarantee small importance for irrelevant columns, because the very restriction that decorrelates the trees - a random, incomplete menu at each split - is what occasionally hands a split to noise with nothing better on offer.</a:t>
             </a:r>
           </a:p>
           <a:p>
@@ -3474,7 +3474,7 @@
             </a:pPr>
             <a:r>
               <a:rPr/>
-              <a:t>The cell to protect is the noise-column sweep. Let them add the columns themselves and watch the importance share climb — reading the number off a slide does not land the same way as watching it happen.</a:t>
+              <a:t>The cell to protect is the noise-column sweep. Let them add the columns themselves and watch the importance share climb - reading the number off a slide does not land the same way as watching it happen.</a:t>
             </a:r>
           </a:p>
           <a:p>
@@ -3508,7 +3508,7 @@
             </a:r>
             <a:r>
               <a:rPr/>
-              <a:t> and predict what happens to the noise share before running it — it should fall, at the cost of the decorrelation that made the forest work in the first place.</a:t>
+              <a:t> and predict what happens to the noise share before running it - it should fall, at the cost of the decorrelation that made the forest work in the first place.</a:t>
             </a:r>
           </a:p>
         </p:txBody>
@@ -3604,7 +3604,7 @@
             </a:pPr>
             <a:r>
               <a:rPr/>
-              <a:t>Name α carefully and tie it to the course’s shared notation — this is the same symbol as lesson 3’s gradient descent learning rate, doing an analogous job: how large a step each correction takes.</a:t>
+              <a:t>Name α carefully and tie it to the course’s shared notation - this is the same symbol as lesson 3’s gradient descent learning rate, doing an analogous job: how large a step each correction takes.</a:t>
             </a:r>
           </a:p>
           <a:p>
@@ -3714,7 +3714,7 @@
             </a:pPr>
             <a:r>
               <a:rPr/>
-              <a:t>Do not derive anything further here — the next slide states what ht is actually fit to. Handout section 8.</a:t>
+              <a:t>Do not derive anything further here - the next slide states what ht is actually fit to. Handout section 8.</a:t>
             </a:r>
           </a:p>
         </p:txBody>
@@ -3796,21 +3796,21 @@
             </a:pPr>
             <a:r>
               <a:rPr/>
-              <a:t>State the result without the calculus. For plain squared-error regression, what a new tree corrects is literally the residual — the gap between the truth and the ensemble’s current prediction. That is intuitive on its own and does not need a derivative to justify.</a:t>
-            </a:r>
-          </a:p>
-          <a:p>
-            <a:pPr lvl="0" indent="0" marL="0">
-              <a:buNone/>
-            </a:pPr>
-          </a:p>
-          <a:p>
-            <a:pPr lvl="0" indent="0" marL="0">
-              <a:buNone/>
-            </a:pPr>
-            <a:r>
-              <a:rPr/>
-              <a:t>The second bullet is the generalisation that pays off in the very next segment: the same recipe — fit a tree to the negative gradient of whatever loss you’re using — covers classification too, once the loss changes from squared error to something else. Handout section 8 has the one line of algebra connecting the two.</a:t>
+              <a:t>State the result without the calculus. For plain squared-error regression, what a new tree corrects is literally the residual - the gap between the truth and the ensemble’s current prediction. That is intuitive on its own and does not need a derivative to justify.</a:t>
+            </a:r>
+          </a:p>
+          <a:p>
+            <a:pPr lvl="0" indent="0" marL="0">
+              <a:buNone/>
+            </a:pPr>
+          </a:p>
+          <a:p>
+            <a:pPr lvl="0" indent="0" marL="0">
+              <a:buNone/>
+            </a:pPr>
+            <a:r>
+              <a:rPr/>
+              <a:t>The second bullet is the generalisation that pays off in the very next segment: the same recipe - fit a tree to the negative gradient of whatever loss you’re using - covers classification too, once the loss changes from squared error to something else. Handout section 8 has the one line of algebra connecting the two.</a:t>
             </a:r>
           </a:p>
         </p:txBody>
@@ -3906,7 +3906,7 @@
             </a:pPr>
             <a:r>
               <a:rPr/>
-              <a:t>Say the numbers as you point: one tree barely moves the flat starting guess. Five trees sketch the coarse shape. Twenty trace the step function closely — the ensemble’s best point, on the next slide. By sixty, the ensemble is tracking individual noisy observations as well as the underlying shape.</a:t>
+              <a:t>Say the numbers as you point: one tree barely moves the flat starting guess. Five trees sketch the coarse shape. Twenty trace the step function closely - the ensemble’s best point, on the next slide. By sixty, the ensemble is tracking individual noisy observations as well as the underlying shape.</a:t>
             </a:r>
           </a:p>
           <a:p>
@@ -4024,7 +4024,7 @@
             </a:pPr>
             <a:r>
               <a:rPr/>
-              <a:t>Name what this is: the same overfitting story as the unconstrained single tree from section 3, reached by a completely different route — not one tree grown too deep, but too many shallow trees each chasing whatever residual noise is left.</a:t>
+              <a:t>Name what this is: the same overfitting story as the unconstrained single tree from section 3, reached by a completely different route - not one tree grown too deep, but too many shallow trees each chasing whatever residual noise is left.</a:t>
             </a:r>
           </a:p>
           <a:p>
@@ -4120,7 +4120,7 @@
             </a:pPr>
             <a:r>
               <a:rPr/>
-              <a:t>State the result, not the chain rule behind it — the handout carries the full derivative. What matters for this course is the connection: boosting for classification fits a sequence of small trees to y - p, one correction at a time, rather than adjusting a fixed set of linear coefficients against the same quantity in one continuous descent.</a:t>
+              <a:t>State the result, not the chain rule behind it - the handout carries the full derivative. What matters for this course is the connection: boosting for classification fits a sequence of small trees to y - p, one correction at a time, rather than adjusting a fixed set of linear coefficients against the same quantity in one continuous descent.</a:t>
             </a:r>
           </a:p>
           <a:p>
@@ -4340,7 +4340,7 @@
             </a:pPr>
             <a:r>
               <a:rPr/>
-              <a:t>Give the number and let it sit against everything shown so far this lesson: 0.902, from a method run at scikit-learn’s defaults, no tuning at all. Ask the room to recall the single tuned tree’s number from section 3 — 0.882 at depth 8 — and note that boosting has already passed it without being told anything about depth.</a:t>
+              <a:t>Give the number and let it sit against everything shown so far this lesson: 0.902, from a method run at scikit-learn’s defaults, no tuning at all. Ask the room to recall the single tuned tree’s number from section 3 - 0.882 at depth 8 - and note that boosting has already passed it without being told anything about depth.</a:t>
             </a:r>
           </a:p>
           <a:p>
@@ -4458,21 +4458,21 @@
             </a:pPr>
             <a:r>
               <a:rPr/>
-              <a:t>Unlike bagging, boosting keeps reducing training error for as long as it runs, because every new tree is built specifically to reduce what remains — including the 7% of labels that are noise by construction. There is nothing in the algorithm itself that says “stop”.</a:t>
-            </a:r>
-          </a:p>
-          <a:p>
-            <a:pPr lvl="0" indent="0" marL="0">
-              <a:buNone/>
-            </a:pPr>
-          </a:p>
-          <a:p>
-            <a:pPr lvl="0" indent="0" marL="0">
-              <a:buNone/>
-            </a:pPr>
-            <a:r>
-              <a:rPr/>
-              <a:t>Point at the peak, 30 trees, and then at 800: training accuracy has been at 1.000 since well before 200, and cross-validated accuracy has drifted down by about a point since the peak. Contrast the size of that drop with section 3’s unconstrained tree, which lost three points past its own peak — boosting’s overfitting is real but gentler.</a:t>
+              <a:t>Unlike bagging, boosting keeps reducing training error for as long as it runs, because every new tree is built specifically to reduce what remains - including the 7% of labels that are noise by construction. There is nothing in the algorithm itself that says “stop”.</a:t>
+            </a:r>
+          </a:p>
+          <a:p>
+            <a:pPr lvl="0" indent="0" marL="0">
+              <a:buNone/>
+            </a:pPr>
+          </a:p>
+          <a:p>
+            <a:pPr lvl="0" indent="0" marL="0">
+              <a:buNone/>
+            </a:pPr>
+            <a:r>
+              <a:rPr/>
+              <a:t>Point at the peak, 30 trees, and then at 800: training accuracy has been at 1.000 since well before 200, and cross-validated accuracy has drifted down by about a point since the peak. Contrast the size of that drop with section 3’s unconstrained tree, which lost three points past its own peak - boosting’s overfitting is real but gentler.</a:t>
             </a:r>
           </a:p>
           <a:p>
@@ -4582,7 +4582,7 @@
             </a:pPr>
             <a:r>
               <a:rPr/>
-              <a:t>The point worth making explicit: the damage per added tree here is small and easy to miss on a single run — which is exactly why early stopping matters for boosting rather than being optional, even though the overfit is gentler than a single unconstrained tree’s.</a:t>
+              <a:t>The point worth making explicit: the damage per added tree here is small and easy to miss on a single run - which is exactly why early stopping matters for boosting rather than being optional, even though the overfit is gentler than a single unconstrained tree’s.</a:t>
             </a:r>
           </a:p>
           <a:p>
@@ -4678,21 +4678,21 @@
             </a:pPr>
             <a:r>
               <a:rPr/>
-              <a:t>Learning rate and tree count are not independent — both control how much total correction the ensemble applies, so they trade off against each other. At α = 0.02, 120 trees haven’t finished fitting the signal: training accuracy is still under 0.89. At α = 1.00, the ensemble has memorised the training set completely and given back several points of cross-validated accuracy for it.</a:t>
-            </a:r>
-          </a:p>
-          <a:p>
-            <a:pPr lvl="0" indent="0" marL="0">
-              <a:buNone/>
-            </a:pPr>
-          </a:p>
-          <a:p>
-            <a:pPr lvl="0" indent="0" marL="0">
-              <a:buNone/>
-            </a:pPr>
-            <a:r>
-              <a:rPr/>
-              <a:t>The best setting sits in between — large enough to make real progress within the tree budget, small enough that any one correction is easy to outvote if it turns out to be wrong. Ask the room which direction they’d guess is “more regularised” before revealing that it’s the </a:t>
+              <a:t>Learning rate and tree count are not independent - both control how much total correction the ensemble applies, so they trade off against each other. At α = 0.02, 120 trees haven’t finished fitting the signal: training accuracy is still under 0.89. At α = 1.00, the ensemble has memorised the training set completely and given back several points of cross-validated accuracy for it.</a:t>
+            </a:r>
+          </a:p>
+          <a:p>
+            <a:pPr lvl="0" indent="0" marL="0">
+              <a:buNone/>
+            </a:pPr>
+          </a:p>
+          <a:p>
+            <a:pPr lvl="0" indent="0" marL="0">
+              <a:buNone/>
+            </a:pPr>
+            <a:r>
+              <a:rPr/>
+              <a:t>The best setting sits in between - large enough to make real progress within the tree budget, small enough that any one correction is easy to outvote if it turns out to be wrong. Ask the room which direction they’d guess is “more regularised” before revealing that it’s the </a:t>
             </a:r>
             <a:r>
               <a:rPr i="1"/>
@@ -4810,21 +4810,21 @@
             </a:pPr>
             <a:r>
               <a:rPr/>
-              <a:t>The cell to protect is the residual sweep at 1, 5, 20 and 60 trees — seeing the ensemble’s fit against the true function rise and then fall again, in real time, is the most direct experience of boosting’s overfitting available in this course.</a:t>
-            </a:r>
-          </a:p>
-          <a:p>
-            <a:pPr lvl="0" indent="0" marL="0">
-              <a:buNone/>
-            </a:pPr>
-          </a:p>
-          <a:p>
-            <a:pPr lvl="0" indent="0" marL="0">
-              <a:buNone/>
-            </a:pPr>
-            <a:r>
-              <a:rPr/>
-              <a:t>If time is short, skip the learning-rate sweep live and set it as reading — the table is in handout section 10.</a:t>
+              <a:t>The cell to protect is the residual sweep at 1, 5, 20 and 60 trees - seeing the ensemble’s fit against the true function rise and then fall again, in real time, is the most direct experience of boosting’s overfitting available in this course.</a:t>
+            </a:r>
+          </a:p>
+          <a:p>
+            <a:pPr lvl="0" indent="0" marL="0">
+              <a:buNone/>
+            </a:pPr>
+          </a:p>
+          <a:p>
+            <a:pPr lvl="0" indent="0" marL="0">
+              <a:buNone/>
+            </a:pPr>
+            <a:r>
+              <a:rPr/>
+              <a:t>If time is short, skip the learning-rate sweep live and set it as reading - the table is in handout section 10.</a:t>
             </a:r>
           </a:p>
         </p:txBody>
@@ -4906,21 +4906,21 @@
             </a:pPr>
             <a:r>
               <a:rPr/>
-              <a:t>Everything from this lesson, cross-validated the same way. Read down the column and let the pattern speak before naming it: every ensemble method — bagging, the random forest, gradient boosting — lands within about a point and a half of the others, and all three sit closer to the ceiling than either single tree.</a:t>
-            </a:r>
-          </a:p>
-          <a:p>
-            <a:pPr lvl="0" indent="0" marL="0">
-              <a:buNone/>
-            </a:pPr>
-          </a:p>
-          <a:p>
-            <a:pPr lvl="0" indent="0" marL="0">
-              <a:buNone/>
-            </a:pPr>
-            <a:r>
-              <a:rPr/>
-              <a:t>The ceiling itself: 1 minus the 7% of labels deliberately flipped. No method reaches it, and none should — a model that classified the flipped labels “correctly” would be modelling the noise, not the rule.</a:t>
+              <a:t>Everything from this lesson, cross-validated the same way. Read down the column and let the pattern speak before naming it: every ensemble method - bagging, the random forest, gradient boosting - lands within about a point and a half of the others, and all three sit closer to the ceiling than either single tree.</a:t>
+            </a:r>
+          </a:p>
+          <a:p>
+            <a:pPr lvl="0" indent="0" marL="0">
+              <a:buNone/>
+            </a:pPr>
+          </a:p>
+          <a:p>
+            <a:pPr lvl="0" indent="0" marL="0">
+              <a:buNone/>
+            </a:pPr>
+            <a:r>
+              <a:rPr/>
+              <a:t>The ceiling itself: 1 minus the 7% of labels deliberately flipped. No method reaches it, and none should - a model that classified the flipped labels “correctly” would be modelling the noise, not the rule.</a:t>
             </a:r>
           </a:p>
           <a:p>
@@ -5016,21 +5016,21 @@
             </a:pPr>
             <a:r>
               <a:rPr/>
-              <a:t>Read the three findings as a set — together they are this lesson’s real content, more than any single accuracy number.</a:t>
-            </a:r>
-          </a:p>
-          <a:p>
-            <a:pPr lvl="0" indent="0" marL="0">
-              <a:buNone/>
-            </a:pPr>
-          </a:p>
-          <a:p>
-            <a:pPr lvl="0" indent="0" marL="0">
-              <a:buNone/>
-            </a:pPr>
-            <a:r>
-              <a:rPr/>
-              <a:t>The third finding is the one to land hardest, because it repeats a pattern they’ve now seen four times with four different methods: flexibility without a stopping rule is not an advantage. Ask the room to name the earlier three occurrences before you do — k = 1 in lesson 6, an unregularised fit in lesson 3, and today’s own unconstrained tree from section 3.</a:t>
+              <a:t>Read the three findings as a set - together they are this lesson’s real content, more than any single accuracy number.</a:t>
+            </a:r>
+          </a:p>
+          <a:p>
+            <a:pPr lvl="0" indent="0" marL="0">
+              <a:buNone/>
+            </a:pPr>
+          </a:p>
+          <a:p>
+            <a:pPr lvl="0" indent="0" marL="0">
+              <a:buNone/>
+            </a:pPr>
+            <a:r>
+              <a:rPr/>
+              <a:t>The third finding is the one to land hardest, because it repeats a pattern they’ve now seen four times with four different methods: flexibility without a stopping rule is not an advantage. Ask the room to name the earlier three occurrences before you do - k = 1 in lesson 6, an unregularised fit in lesson 3, and today’s own unconstrained tree from section 3.</a:t>
             </a:r>
           </a:p>
           <a:p>
@@ -5250,7 +5250,7 @@
             </a:pPr>
             <a:r>
               <a:rPr/>
-              <a:t>Ask them to write it down — derivations fade, this kind of number tends not to. It is the fourth lesson this course has produced one of these: coin flip labels, borrowed test-set values, an overfit coefficient of 247,514, and now this.</a:t>
+              <a:t>Ask them to write it down - derivations fade, this kind of number tends not to. It is the fourth lesson this course has produced one of these: coin flip labels, borrowed test-set values, an overfit coefficient of 247,514, and now this.</a:t>
             </a:r>
           </a:p>
           <a:p>
@@ -5360,21 +5360,21 @@
             </a:pPr>
             <a:r>
               <a:rPr/>
-              <a:t>If they remember one habit from today, make it this: before trusting a random forest’s importance ranking, ask how many candidate columns compete for attention at each split, because that number — not the accuracy score — is what decides how much noise gets credit it didn’t earn.</a:t>
-            </a:r>
-          </a:p>
-          <a:p>
-            <a:pPr lvl="0" indent="0" marL="0">
-              <a:buNone/>
-            </a:pPr>
-          </a:p>
-          <a:p>
-            <a:pPr lvl="0" indent="0" marL="0">
-              <a:buNone/>
-            </a:pPr>
-            <a:r>
-              <a:rPr/>
-              <a:t>Next lesson turns from labelled data to unlabelled data — a fourth question this course asks of a dataset, after “what’s the relationship”, “which class”, and “how do you know you’re not fooling yourself”: what structure is there when nobody has told you the answer at all.</a:t>
+              <a:t>If they remember one habit from today, make it this: before trusting a random forest’s importance ranking, ask how many candidate columns compete for attention at each split, because that number - not the accuracy score - is what decides how much noise gets credit it didn’t earn.</a:t>
+            </a:r>
+          </a:p>
+          <a:p>
+            <a:pPr lvl="0" indent="0" marL="0">
+              <a:buNone/>
+            </a:pPr>
+          </a:p>
+          <a:p>
+            <a:pPr lvl="0" indent="0" marL="0">
+              <a:buNone/>
+            </a:pPr>
+            <a:r>
+              <a:rPr/>
+              <a:t>Next lesson turns from labelled data to unlabelled data - a fourth question this course asks of a dataset, after “what’s the relationship”, “which class”, and “how do you know you’re not fooling yourself”: what structure is there when nobody has told you the answer at all.</a:t>
             </a:r>
           </a:p>
           <a:p>
@@ -5470,21 +5470,21 @@
             </a:pPr>
             <a:r>
               <a:rPr/>
-              <a:t>Unlike lesson 6’s pumps, logistic regression clears the baseline by a wide margin here — it has learned something. Three of the four risky regions are monotonic in at least one feature, and a linear boundary handles monotonic effects reasonably well.</a:t>
-            </a:r>
-          </a:p>
-          <a:p>
-            <a:pPr lvl="0" indent="0" marL="0">
-              <a:buNone/>
-            </a:pPr>
-          </a:p>
-          <a:p>
-            <a:pPr lvl="0" indent="0" marL="0">
-              <a:buNone/>
-            </a:pPr>
-            <a:r>
-              <a:rPr/>
-              <a:t>What it cannot do is wall off the two interior islands without cutting into healthy territory everywhere else. Ask the room what kind of boundary could close that gap, and let a few guesses land before moving on — a threshold rule, applied more than once, is exactly the answer the rest of the lesson builds.</a:t>
+              <a:t>Unlike lesson 6’s pumps, logistic regression clears the baseline by a wide margin here - it has learned something. Three of the four risky regions are monotonic in at least one feature, and a linear boundary handles monotonic effects reasonably well.</a:t>
+            </a:r>
+          </a:p>
+          <a:p>
+            <a:pPr lvl="0" indent="0" marL="0">
+              <a:buNone/>
+            </a:pPr>
+          </a:p>
+          <a:p>
+            <a:pPr lvl="0" indent="0" marL="0">
+              <a:buNone/>
+            </a:pPr>
+            <a:r>
+              <a:rPr/>
+              <a:t>What it cannot do is wall off the two interior islands without cutting into healthy territory everywhere else. Ask the room what kind of boundary could close that gap, and let a few guesses land before moving on - a threshold rule, applied more than once, is exactly the answer the rest of the lesson builds.</a:t>
             </a:r>
           </a:p>
           <a:p>
@@ -5580,21 +5580,21 @@
             </a:pPr>
             <a:r>
               <a:rPr/>
-              <a:t>Set it explicitly and say the deadline out loud: Friday 13 November, 23:59 — the same date lesson 8 begins.</a:t>
-            </a:r>
-          </a:p>
-          <a:p>
-            <a:pPr lvl="0" indent="0" marL="0">
-              <a:buNone/>
-            </a:pPr>
-          </a:p>
-          <a:p>
-            <a:pPr lvl="0" indent="0" marL="0">
-              <a:buNone/>
-            </a:pPr>
-            <a:r>
-              <a:rPr/>
-              <a:t>Remind them of the standing rule from lesson 5: every reported number needs a cross-validated spread, and any feature-importance claim needs the check this lesson just demonstrated — a random forest’s importance ranking is a claim to be verified, not a fact to be quoted.</a:t>
+              <a:t>Set it explicitly and say the deadline out loud: Friday 13 November, 23:59 - the same date lesson 8 begins.</a:t>
+            </a:r>
+          </a:p>
+          <a:p>
+            <a:pPr lvl="0" indent="0" marL="0">
+              <a:buNone/>
+            </a:pPr>
+          </a:p>
+          <a:p>
+            <a:pPr lvl="0" indent="0" marL="0">
+              <a:buNone/>
+            </a:pPr>
+            <a:r>
+              <a:rPr/>
+              <a:t>Remind them of the standing rule from lesson 5: every reported number needs a cross-validated spread, and any feature-importance claim needs the check this lesson just demonstrated - a random forest’s importance ranking is a claim to be verified, not a fact to be quoted.</a:t>
             </a:r>
           </a:p>
           <a:p>
@@ -5690,21 +5690,21 @@
             </a:pPr>
             <a:r>
               <a:rPr/>
-              <a:t>Read the algorithm as one sentence and let it sit — it really is that short. Contrast it explicitly with lessons 3 and 4: no cost function is minimised over a continuous parameter, there is no gradient step. A tree is a sequence of yes/no questions, chosen one at a time.</a:t>
-            </a:r>
-          </a:p>
-          <a:p>
-            <a:pPr lvl="0" indent="0" marL="0">
-              <a:buNone/>
-            </a:pPr>
-          </a:p>
-          <a:p>
-            <a:pPr lvl="0" indent="0" marL="0">
-              <a:buNone/>
-            </a:pPr>
-            <a:r>
-              <a:rPr/>
-              <a:t>The word to stress is “greedy”. At every step the tree takes whichever split helps most immediately, with no mechanism for looking two levels ahead. Tell them to hold onto that word — it is what explains, later this hour, why a shallow tree can miss the interior islands entirely even though the information to find them is right there in the data.</a:t>
+              <a:t>Read the algorithm as one sentence and let it sit - it really is that short. Contrast it explicitly with lessons 3 and 4: no cost function is minimised over a continuous parameter, there is no gradient step. A tree is a sequence of yes/no questions, chosen one at a time.</a:t>
+            </a:r>
+          </a:p>
+          <a:p>
+            <a:pPr lvl="0" indent="0" marL="0">
+              <a:buNone/>
+            </a:pPr>
+          </a:p>
+          <a:p>
+            <a:pPr lvl="0" indent="0" marL="0">
+              <a:buNone/>
+            </a:pPr>
+            <a:r>
+              <a:rPr/>
+              <a:t>The word to stress is “greedy”. At every step the tree takes whichever split helps most immediately, with no mechanism for looking two levels ahead. Tell them to hold onto that word - it is what explains, later this hour, why a shallow tree can miss the interior islands entirely even though the information to find them is right there in the data.</a:t>
             </a:r>
           </a:p>
           <a:p>
@@ -5814,7 +5814,7 @@
             </a:pPr>
             <a:r>
               <a:rPr/>
-              <a:t>Say plainly that the standard choice for classification is called the Gini impurity, and that it is not a probability of misclassification — it is the probability that two examples drawn at random with replacement from the group, and labelled according to the group’s own class frequencies, would disagree.</a:t>
+              <a:t>Say plainly that the standard choice for classification is called the Gini impurity, and that it is not a probability of misclassification - it is the probability that two examples drawn at random with replacement from the group, and labelled according to the group’s own class frequencies, would disagree.</a:t>
             </a:r>
           </a:p>
           <a:p>
@@ -5910,7 +5910,7 @@
             </a:pPr>
             <a:r>
               <a:rPr/>
-              <a:t>pc is the fraction of the group belonging to class c, across C classes. Do not derive anything here — state what it does: subtract, from one, the chance two examples share a class if drawn independently from the group’s own frequencies. A pure group scores zero; a maximally mixed one scores as high as the formula allows.</a:t>
+              <a:t>pc is the fraction of the group belonging to class c, across C classes. Do not derive anything here - state what it does: subtract, from one, the chance two examples share a class if drawn independently from the group’s own frequencies. A pure group scores zero; a maximally mixed one scores as high as the formula allows.</a:t>
             </a:r>
           </a:p>
           <a:p>
@@ -5932,7 +5932,7 @@
             </a:r>
             <a:r>
               <a:rPr/>
-              <a:t> class is common, only about how mixed the group is — that symmetry matters later, when a split is chosen purely by how much it reduces this number.</a:t>
+              <a:t> class is common, only about how mixed the group is - that symmetry matters later, when a split is chosen purely by how much it reduces this number.</a:t>
             </a:r>
           </a:p>
           <a:p>
@@ -6028,7 +6028,7 @@
             </a:pPr>
             <a:r>
               <a:rPr/>
-              <a:t>Two classes is the case that matters for this dataset, and the formula collapses to something with an obvious shape: zero at the extremes, a single peak at fifty-fifty. Ask the room to sanity-check the peak location before you confirm it — it is the point where a random guess is least useful.</a:t>
+              <a:t>Two classes is the case that matters for this dataset, and the formula collapses to something with an obvious shape: zero at the extremes, a single peak at fifty-fifty. Ask the room to sanity-check the peak location before you confirm it - it is the point where a random guess is least useful.</a:t>
             </a:r>
           </a:p>
           <a:p>
@@ -9129,7 +9129,7 @@
             </a:pPr>
             <a:r>
               <a:rPr/>
-              <a:t>Lesson 7 — Trees and Ensembles</a:t>
+              <a:t>Lesson 7: Trees and Ensembles</a:t>
             </a:r>
           </a:p>
         </p:txBody>
@@ -9165,7 +9165,7 @@
             <a:br/>
             <a:r>
               <a:rPr/>
-              <a:t>Fabio Antonini — Università degli Studi dell’Aquila</a:t>
+              <a:t>Fabio Antonini, Università degli Studi dell’Aquila</a:t>
             </a:r>
           </a:p>
         </p:txBody>
@@ -9406,7 +9406,7 @@
             <a:pPr lvl="0"/>
             <a:r>
               <a:rPr/>
-              <a:t>“On average” is weighted by how many examples land in each child — a split that purifies nine points and dumps one troublemaker into its own leaf is not free</a:t>
+              <a:t>“On average” is weighted by how many examples land in each child: a split that purifies nine points and dumps one troublemaker into its own leaf is not free</a:t>
             </a:r>
           </a:p>
         </p:txBody>
@@ -9837,7 +9837,7 @@
             <a:pPr lvl="0"/>
             <a:r>
               <a:rPr/>
-              <a:t>From here on, the notebooks use scikit-learn’s implementation — the same algorithm, compiled, not a different one</a:t>
+              <a:t>From here on, the notebooks use scikit-learn’s implementation: the same algorithm, compiled, not a different one</a:t>
             </a:r>
           </a:p>
         </p:txBody>
@@ -9917,7 +9917,7 @@
             <a:pPr lvl="0"/>
             <a:r>
               <a:rPr/>
-              <a:t>The search never asks “which pair of splits helps most together” — only “which single split helps most right now”</a:t>
+              <a:t>The search never asks “which pair of splits helps most together”: only “which single split helps most right now”</a:t>
             </a:r>
           </a:p>
           <a:p>
@@ -9939,7 +9939,7 @@
             <a:pPr lvl="0"/>
             <a:r>
               <a:rPr/>
-              <a:t>Exactly what happens to this dataset’s two interior “stressed” islands — covered next</a:t>
+              <a:t>Exactly what happens to this dataset’s two interior “stressed” islands, covered next</a:t>
             </a:r>
           </a:p>
         </p:txBody>
@@ -10036,7 +10036,7 @@
             </a:r>
             <a:r>
               <a:rPr/>
-              <a:t> — few questions, only the coarsest structure. High bias, low variance</a:t>
+              <a:t>: few questions, only the coarsest structure. High bias, low variance</a:t>
             </a:r>
           </a:p>
           <a:p>
@@ -10047,7 +10047,7 @@
             </a:r>
             <a:r>
               <a:rPr/>
-              <a:t> — enough questions to isolate almost any subset, down to single points. At full depth, training accuracy is </a:t>
+              <a:t>: enough questions to isolate almost any subset, down to single points. At full depth, training accuracy is </a:t>
             </a:r>
             <a:r>
               <a:rPr b="1"/>
@@ -10897,7 +10897,7 @@
             </a:r>
             <a:r>
               <a:rPr/>
-              <a:t> — every leaf at level d splits before any leaf reaches d+1, useful or not</a:t>
+              <a:t>: every leaf at level d splits before any leaf reaches d+1, useful or not</a:t>
             </a:r>
           </a:p>
           <a:p>
@@ -10918,7 +10918,7 @@
             </a:r>
             <a:r>
               <a:rPr/>
-              <a:t> — always expanding whichever leaf offers the largest Δ G</a:t>
+              <a:t>: always expanding whichever leaf offers the largest Δ G</a:t>
             </a:r>
           </a:p>
           <a:p>
@@ -10943,7 +10943,7 @@
             </a:r>
             <a:r>
               <a:rPr/>
-              <a:t> training accuracy, every threshold recognisable — 28 the income floor, 0.82 the debt ceiling</a:t>
+              <a:t> training accuracy, every threshold recognisable: 28 the income floor, 0.82 the debt ceiling</a:t>
             </a:r>
           </a:p>
         </p:txBody>
@@ -11040,7 +11040,7 @@
             <a:pPr lvl="0"/>
             <a:r>
               <a:rPr/>
-              <a:t>The debt ceiling — the strongest split — agrees to within </a:t>
+              <a:t>The debt ceiling, the strongest split, agrees to within </a:t>
             </a:r>
             <a:r>
               <a:rPr b="1"/>
@@ -11321,7 +11321,7 @@
             <a:pPr lvl="0"/>
             <a:r>
               <a:rPr/>
-              <a:t>If a tree’s mistakes are somewhat random — different across resamples, as just measured — </a:t>
+              <a:t>If a tree’s mistakes are somewhat random: different across resamples, as just measured: </a:t>
             </a:r>
             <a:r>
               <a:rPr b="1"/>
@@ -11380,7 +11380,7 @@
             <a:pPr lvl="0"/>
             <a:r>
               <a:rPr/>
-              <a:t>The tree algorithm itself is unchanged — only what surrounds it is new</a:t>
+              <a:t>The tree algorithm itself is unchanged, only what surrounds it is new</a:t>
             </a:r>
           </a:p>
         </p:txBody>
@@ -11490,7 +11490,7 @@
             </a:r>
             <a:r>
               <a:rPr/>
-              <a:t> are left out entirely — called </a:t>
+              <a:t> are left out entirely: called </a:t>
             </a:r>
             <a:r>
               <a:rPr b="1"/>
@@ -11630,7 +11630,7 @@
             </a:r>
             <a:r>
               <a:rPr/>
-              <a:t>: over twelve seeds the gap is 0.003 — agreement to within their own noise, not to every decimal</a:t>
+              <a:t>: over twelve seeds the gap is 0.003: agreement to within their own noise, not to every decimal</a:t>
             </a:r>
           </a:p>
         </p:txBody>
@@ -11733,7 +11733,7 @@
             </a:r>
             <a:r>
               <a:rPr/>
-              <a:t> — adding trees past that point buys almost nothing</a:t>
+              <a:t>: adding trees past that point buys almost nothing</a:t>
             </a:r>
           </a:p>
           <a:p>
@@ -12163,7 +12163,7 @@
             <a:pPr lvl="0"/>
             <a:r>
               <a:rPr/>
-              <a:t>The variance floor is ρσ² — lowering it further means making the trees agree </a:t>
+              <a:t>The variance floor is ρσ²: lowering it further means making the trees agree </a:t>
             </a:r>
             <a:r>
               <a:rPr b="1"/>
@@ -12207,7 +12207,7 @@
             </a:r>
             <a:r>
               <a:rPr/>
-              <a:t> (default √n, rounded down) — different trees see different features at the same point, lowering ρ</a:t>
+              <a:t> (default √n, rounded down): different trees see different features at the same point, lowering ρ</a:t>
             </a:r>
           </a:p>
         </p:txBody>
@@ -13138,7 +13138,7 @@
             <a:pPr lvl="0"/>
             <a:r>
               <a:rPr/>
-              <a:t>Each addition is a shallow tree — depth 2 or 3, a </a:t>
+              <a:t>Each addition is a shallow tree: depth 2 or 3, a </a:t>
             </a:r>
             <a:r>
               <a:rPr b="1"/>
@@ -13334,7 +13334,7 @@
             <a:pPr lvl="0"/>
             <a:r>
               <a:rPr/>
-              <a:t>This is a special case of a more general idea — </a:t>
+              <a:t>This is a special case of a more general idea: </a:t>
             </a:r>
             <a:r>
               <a:rPr b="1"/>
@@ -13515,7 +13515,7 @@
             </a:r>
             <a:r>
               <a:rPr/>
-              <a:t>: mean squared error (MSE) against the true function 0.395 — barely moves the flat guess</a:t>
+              <a:t>: mean squared error (MSE) against the true function 0.395, barely moves the flat guess</a:t>
             </a:r>
           </a:p>
           <a:p>
@@ -13526,7 +13526,7 @@
             </a:r>
             <a:r>
               <a:rPr/>
-              <a:t>: MSE 0.068 — the coarse shape appears</a:t>
+              <a:t>: MSE 0.068, the coarse shape appears</a:t>
             </a:r>
           </a:p>
           <a:p>
@@ -13545,7 +13545,7 @@
             </a:r>
             <a:r>
               <a:rPr/>
-              <a:t> — the ensemble’s best point</a:t>
+              <a:t>, the ensemble’s best point</a:t>
             </a:r>
           </a:p>
           <a:p>
@@ -13556,7 +13556,7 @@
             </a:r>
             <a:r>
               <a:rPr/>
-              <a:t>: MSE rises back to 0.018 — tracking noise, not signal</a:t>
+              <a:t>: MSE rises back to 0.018, tracking noise, not signal</a:t>
             </a:r>
           </a:p>
         </p:txBody>
@@ -13769,7 +13769,7 @@
             </a:r>
             <a:r>
               <a:rPr/>
-              <a:t> — lesson 4’s loss for logistic regression</a:t>
+              <a:t>: lesson 4’s loss for logistic regression</a:t>
             </a:r>
           </a:p>
           <a:p>
@@ -15364,7 +15364,7 @@
             <a:pPr lvl="0"/>
             <a:r>
               <a:rPr/>
-              <a:t>Every ensemble lands within about a point and a half of the others — </a:t>
+              <a:t>Every ensemble lands within about a point and a half of the others, </a:t>
             </a:r>
             <a:r>
               <a:rPr b="1"/>
@@ -15667,7 +15667,7 @@
                       </a:pPr>
                       <a:r>
                         <a:rPr/>
-                        <a:t>A random forest — no explicit train/test split needed</a:t>
+                        <a:t>A random forest, no explicit train/test split needed</a:t>
                       </a:r>
                     </a:p>
                   </a:txBody>
@@ -15752,7 +15752,7 @@
             <a:pPr lvl="0"/>
             <a:r>
               <a:rPr/>
-              <a:t>20 noise columns, 2 real features — not a small effect, and not a bug</a:t>
+              <a:t>20 noise columns, 2 real features: not a small effect, and not a bug</a:t>
             </a:r>
           </a:p>
           <a:p>
@@ -16008,7 +16008,7 @@
             </a:r>
             <a:r>
               <a:rPr/>
-              <a:t> — today’s number worth remembering</a:t>
+              <a:t>, today’s number worth remembering</a:t>
             </a:r>
           </a:p>
         </p:txBody>
@@ -16388,7 +16388,7 @@
             <a:pPr lvl="0"/>
             <a:r>
               <a:rPr/>
-              <a:t>Nothing is estimated — no coefficient, no gradient with respect to a parameter vector</a:t>
+              <a:t>Nothing is estimated, no coefficient, no gradient with respect to a parameter vector</a:t>
             </a:r>
           </a:p>
           <a:p>
@@ -16494,7 +16494,7 @@
             <a:pPr lvl="0"/>
             <a:r>
               <a:rPr/>
-              <a:t>A leaf split evenly between classes is the worst case — a coin flip</a:t>
+              <a:t>A leaf split evenly between classes is the worst case: a coin flip</a:t>
             </a:r>
           </a:p>
           <a:p>

--- a/Lessons/07_trees_and_ensembles/Slides/trees_and_ensembles_slides.pptx
+++ b/Lessons/07_trees_and_ensembles/Slides/trees_and_ensembles_slides.pptx
@@ -5250,7 +5250,7 @@
             </a:pPr>
             <a:r>
               <a:rPr/>
-              <a:t>Ask them to write it down - derivations fade, this kind of number tends not to. It is the fourth lesson this course has produced one of these: coin flip labels, borrowed test-set values, an overfit coefficient of 247,514, and now this.</a:t>
+              <a:t>Ask them to write it down - derivations fade, this kind of number tends not to. It is the fourth lesson this course has produced one of these: coin flip labels, borrowed test-set values, a coefficient of 365 where an unpenalised fit wanted billions, and now this.</a:t>
             </a:r>
           </a:p>
           <a:p>

--- a/Lessons/07_trees_and_ensembles/Slides/trees_and_ensembles_slides.pptx
+++ b/Lessons/07_trees_and_ensembles/Slides/trees_and_ensembles_slides.pptx
@@ -11321,7 +11321,7 @@
             <a:pPr lvl="0"/>
             <a:r>
               <a:rPr/>
-              <a:t>If a tree’s mistakes are somewhat random: different across resamples, as just measured: </a:t>
+              <a:t>A tree’s mistakes differ across resamples, as just measured, so </a:t>
             </a:r>
             <a:r>
               <a:rPr b="1"/>
@@ -11329,7 +11329,7 @@
             </a:r>
             <a:r>
               <a:rPr/>
-              <a:t>, should partly cancel them out</a:t>
+              <a:t> should partly cancel out</a:t>
             </a:r>
           </a:p>
           <a:p>
@@ -12567,21 +12567,14 @@
             </a:r>
             <a:r>
               <a:rPr/>
-              <a:t>: total impurity reduction each feature is responsible for, summed and averaged across every tree and every split</a:t>
+              <a:t>: the impurity reduction each feature is responsible for, summed over every tree and split</a:t>
             </a:r>
           </a:p>
           <a:p>
             <a:pPr lvl="0"/>
             <a:r>
               <a:rPr/>
-              <a:t>Tempting to read as “the forest tells you which features matter”</a:t>
-            </a:r>
-          </a:p>
-          <a:p>
-            <a:pPr lvl="0"/>
-            <a:r>
-              <a:rPr/>
-              <a:t>With only the two real features in this dataset, it does exactly that</a:t>
+              <a:t>Tempting to read as “the forest tells you which features matter” - and with only the two real features here, it does exactly that</a:t>
             </a:r>
           </a:p>
           <a:p>
@@ -15364,7 +15357,7 @@
             <a:pPr lvl="0"/>
             <a:r>
               <a:rPr/>
-              <a:t>Every ensemble lands within about a point and a half of the others, </a:t>
+              <a:t>Every ensemble lands within a point and a half of the others: </a:t>
             </a:r>
             <a:r>
               <a:rPr b="1"/>
@@ -15372,7 +15365,7 @@
             </a:r>
             <a:r>
               <a:rPr/>
-              <a:t> you pick matters far less than </a:t>
+              <a:t> matters far less than </a:t>
             </a:r>
             <a:r>
               <a:rPr b="1"/>
@@ -15383,7 +15376,7 @@
             <a:pPr lvl="0"/>
             <a:r>
               <a:rPr/>
-              <a:t>The single tuned tree is not far behind, at 0.883 against 0.911, and it is the only model on the table a person could read start to finish</a:t>
+              <a:t>The tuned single tree is close behind, 0.883 against 0.911, and the only model here a person can read</a:t>
             </a:r>
           </a:p>
           <a:p>
@@ -15959,15 +15952,7 @@
             <a:pPr lvl="0"/>
             <a:r>
               <a:rPr/>
-              <a:t>A tree splits greedily on Gini impurity, verified to the </a:t>
-            </a:r>
-            <a:r>
-              <a:rPr b="1"/>
-              <a:t>fourth decimal place</a:t>
-            </a:r>
-            <a:r>
-              <a:rPr/>
-              <a:t> against scikit-learn</a:t>
+              <a:t>A tree splits greedily on Gini impurity, matching scikit-learn</a:t>
             </a:r>
           </a:p>
           <a:p>
@@ -15980,10 +15965,6 @@
               <a:rPr b="1"/>
               <a:t>depth 8</a:t>
             </a:r>
-            <a:r>
-              <a:rPr/>
-              <a:t>, three points above the unconstrained tree</a:t>
-            </a:r>
           </a:p>
           <a:p>
             <a:pPr lvl="0"/>
@@ -15997,7 +15978,7 @@
             </a:r>
             <a:r>
               <a:rPr/>
-              <a:t> of rows out-of-bag, free validation</a:t>
+              <a:t> of rows out-of-bag: free validation</a:t>
             </a:r>
           </a:p>
           <a:p>
@@ -16008,7 +15989,7 @@
             </a:r>
             <a:r>
               <a:rPr/>
-              <a:t>, today’s number worth remembering</a:t>
+              <a:t>, today’s number</a:t>
             </a:r>
           </a:p>
         </p:txBody>

--- a/Lessons/07_trees_and_ensembles/Slides/trees_and_ensembles_slides.pptx
+++ b/Lessons/07_trees_and_ensembles/Slides/trees_and_ensembles_slides.pptx
@@ -802,7 +802,7 @@
             </a:pPr>
             <a:r>
               <a:rPr/>
-              <a:t>mL and mR are the sizes of the two children, mP = mL + mR. Read it as: what the parent’s impurity was, minus what is left after the split, weighted by how the group was divided. The tree keeps whichever candidate split makes Δ G largest.</a:t>
+              <a:t>mL and mR are the sizes of the two children, mP = mL + mR. Read it as: what the parent’s impurity was, minus what is left after the split, weighted by how the group was divided. The tree keeps whichever candidate split makes ΔG largest.</a:t>
             </a:r>
           </a:p>
           <a:p>
@@ -912,7 +912,7 @@
             </a:pPr>
             <a:r>
               <a:rPr/>
-              <a:t>The last bullet is the one to slow down on. A feature that only helps in combination with a second split further down the tree can be - and in this dataset’s two interior islands, is - invisible to a shallow search, because Δ G is never evaluated for two splits together.</a:t>
+              <a:t>The last bullet is the one to slow down on. A feature that only helps in combination with a second split further down the tree can be - and in this dataset’s two interior islands, is - invisible to a shallow search, because ΔG is never evaluated for two splits together.</a:t>
             </a:r>
           </a:p>
           <a:p>
@@ -9609,7 +9609,7 @@
             </a:r>
             <a:r>
               <a:rPr/>
-              <a:t>: Δ G is judged one split at a time, never jointly</a:t>
+              <a:t>: ΔG is judged one split at a time, never jointly</a:t>
             </a:r>
           </a:p>
         </p:txBody>
@@ -10918,7 +10918,7 @@
             </a:r>
             <a:r>
               <a:rPr/>
-              <a:t>: always expanding whichever leaf offers the largest Δ G</a:t>
+              <a:t>: always expanding whichever leaf offers the largest ΔG</a:t>
             </a:r>
           </a:p>
           <a:p>

--- a/Lessons/07_trees_and_ensembles/Slides/trees_and_ensembles_slides.pptx
+++ b/Lessons/07_trees_and_ensembles/Slides/trees_and_ensembles_slides.pptx
@@ -802,7 +802,7 @@
             </a:pPr>
             <a:r>
               <a:rPr/>
-              <a:t>mL and mR are the sizes of the two children, mP = mL + mR. Read it as: what the parent’s impurity was, minus what is left after the split, weighted by how the group was divided. The tree keeps whichever candidate split makes ΔG largest.</a:t>
+              <a:t>The two m terms are the sizes of the left and right children, and they add to the parent’s. Read it as: what the parent’s impurity was, minus what is left after the split, weighted by how the group was divided. The tree keeps whichever candidate split makes ΔG largest.</a:t>
             </a:r>
           </a:p>
           <a:p>
@@ -3700,21 +3700,21 @@
             </a:pPr>
             <a:r>
               <a:rPr/>
-              <a:t>F₀ is the flat starting guess, the mean of the target. Each subsequent Ft is the previous ensemble plus a scaled correction from the newest tree, ht. Read it left to right: start flat, then keep adding small, scaled corrections.</a:t>
-            </a:r>
-          </a:p>
-          <a:p>
-            <a:pPr lvl="0" indent="0" marL="0">
-              <a:buNone/>
-            </a:pPr>
-          </a:p>
-          <a:p>
-            <a:pPr lvl="0" indent="0" marL="0">
-              <a:buNone/>
-            </a:pPr>
-            <a:r>
-              <a:rPr/>
-              <a:t>Do not derive anything further here - the next slide states what ht is actually fit to. Handout section 8.</a:t>
+              <a:t>F₀ is the flat starting guess, the mean of the target. Each subsequent Fₜ is the previous ensemble plus a scaled correction from the newest tree, hₜ. Read it left to right: start flat, then keep adding small, scaled corrections.</a:t>
+            </a:r>
+          </a:p>
+          <a:p>
+            <a:pPr lvl="0" indent="0" marL="0">
+              <a:buNone/>
+            </a:pPr>
+          </a:p>
+          <a:p>
+            <a:pPr lvl="0" indent="0" marL="0">
+              <a:buNone/>
+            </a:pPr>
+            <a:r>
+              <a:rPr/>
+              <a:t>Do not derive anything further here - the next slide states what hₜ is actually fit to. Handout section 8.</a:t>
             </a:r>
           </a:p>
         </p:txBody>
@@ -5910,7 +5910,7 @@
             </a:pPr>
             <a:r>
               <a:rPr/>
-              <a:t>pc is the fraction of the group belonging to class c, across C classes. Do not derive anything here - state what it does: subtract, from one, the chance two examples share a class if drawn independently from the group’s own frequencies. A pure group scores zero; a maximally mixed one scores as high as the formula allows.</a:t>
+              <a:t>Each p in the sum is the fraction of the group belonging to one class, across C classes. Do not derive anything here - state what it does: subtract, from one, the chance two examples share a class if drawn independently from the group’s own frequencies. A pure group scores zero; a maximally mixed one scores as high as the formula allows.</a:t>
             </a:r>
           </a:p>
           <a:p>
@@ -13320,7 +13320,7 @@
             </a:r>
             <a:r>
               <a:rPr/>
-              <a:t>, y - Ft₋₁(x)</a:t>
+              <a:t>, y - Fₜ₋₁(x)</a:t>
             </a:r>
           </a:p>
           <a:p>
@@ -13335,7 +13335,7 @@
             </a:r>
             <a:r>
               <a:rPr/>
-              <a:t>: ht approximates the negative gradient of the loss with respect to Ft₋₁</a:t>
+              <a:t>: hₜ approximates the negative gradient of the loss with respect to Fₜ₋₁</a:t>
             </a:r>
           </a:p>
           <a:p>

--- a/Lessons/07_trees_and_ensembles/Slides/trees_and_ensembles_slides.pptx
+++ b/Lessons/07_trees_and_ensembles/Slides/trees_and_ensembles_slides.pptx
@@ -5580,7 +5580,7 @@
             </a:pPr>
             <a:r>
               <a:rPr/>
-              <a:t>Set it explicitly and say the deadline out loud: Friday 13 November, 23:59 - the same date lesson 8 begins.</a:t>
+              <a:t>Set it explicitly and say the deadline out loud: Friday 13 November, 09:00 - it is due as lesson 8 begins.</a:t>
             </a:r>
           </a:p>
           <a:p>
@@ -16077,7 +16077,7 @@
             </a:r>
             <a:r>
               <a:rPr b="1"/>
-              <a:t>Friday 13 November 2026, 23:59</a:t>
+              <a:t>Friday 13 November 2026, 09:00</a:t>
             </a:r>
           </a:p>
           <a:p>

--- a/Lessons/07_trees_and_ensembles/Slides/trees_and_ensembles_slides.pptx
+++ b/Lessons/07_trees_and_ensembles/Slides/trees_and_ensembles_slides.pptx
@@ -1794,7 +1794,7 @@
             </a:pPr>
             <a:r>
               <a:rPr/>
-              <a:t>Hand back exercise 6 quickly - a sentence on what the class did well (most picked a defensible family) and a sentence on the common gap (several reports quoted a cross-validated score without ever checking whether the model’s assumption, such as within-class independence, actually held on that data).</a:t>
+              <a:t>Nothing to collect and nothing to hand back - this is a discussion. Ask who picked which family and why, and listen for the common gap: a cross-validated score quoted without any check of whether the model’s assumption, such as within-class independence, actually held on that data.</a:t>
             </a:r>
           </a:p>
           <a:p>
@@ -5580,7 +5580,7 @@
             </a:pPr>
             <a:r>
               <a:rPr/>
-              <a:t>Set it explicitly and say the deadline out loud: Friday 13 November, 09:00 - it is due as lesson 8 begins.</a:t>
+              <a:t>Set it explicitly and say out loud when it comes back: the first ten minutes of lesson 8, Friday 13 November.</a:t>
             </a:r>
           </a:p>
           <a:p>
@@ -12025,7 +12025,7 @@
             </a:pPr>
             <a:r>
               <a:rPr/>
-              <a:t>Exercise 6 returned</a:t>
+              <a:t>Exercise 6, before we start</a:t>
             </a:r>
           </a:p>
         </p:txBody>
@@ -12053,7 +12053,7 @@
             <a:pPr lvl="0"/>
             <a:r>
               <a:rPr/>
-              <a:t>Marks were for the </a:t>
+              <a:t>What counts is the </a:t>
             </a:r>
             <a:r>
               <a:rPr b="1"/>
@@ -12061,14 +12061,14 @@
             </a:r>
             <a:r>
               <a:rPr/>
-              <a:t>, not for the winning score</a:t>
+              <a:t>, not the winning score</a:t>
             </a:r>
           </a:p>
           <a:p>
             <a:pPr lvl="0"/>
             <a:r>
               <a:rPr/>
-              <a:t>The recurring gap: a strong accuracy number with no check of </a:t>
+              <a:t>The gap to watch for: a strong accuracy number with no check of </a:t>
             </a:r>
             <a:r>
               <a:rPr i="1"/>
@@ -16073,11 +16073,11 @@
             </a:r>
             <a:r>
               <a:rPr/>
-              <a:t>, due </a:t>
+              <a:t>, discussed at the start of </a:t>
             </a:r>
             <a:r>
               <a:rPr b="1"/>
-              <a:t>Friday 13 November 2026, 09:00</a:t>
+              <a:t>Friday 13 November</a:t>
             </a:r>
           </a:p>
           <a:p>

--- a/Lessons/07_trees_and_ensembles/Slides/trees_and_ensembles_slides.pptx
+++ b/Lessons/07_trees_and_ensembles/Slides/trees_and_ensembles_slides.pptx
@@ -9479,8 +9479,8 @@
         </p:blipFill>
         <p:spPr bwMode="auto">
           <a:xfrm>
-            <a:off x="457200" y="2547739"/>
-            <a:ext cx="8229600" cy="596900"/>
+            <a:off x="457200" y="2579489"/>
+            <a:ext cx="8229600" cy="533400"/>
           </a:xfrm>
           <a:prstGeom prst="rect">
             <a:avLst/>
@@ -10123,7 +10123,7 @@
           </p:nvPr>
         </p:nvGraphicFramePr>
         <p:xfrm>
-          <a:off x="457200" y="1193800"/>
+          <a:off x="457200" y="1166099"/>
           <a:ext cx="8229600" cy="3390900"/>
         </p:xfrm>
         <a:graphic>
@@ -11816,7 +11816,7 @@
           </p:nvPr>
         </p:nvGraphicFramePr>
         <p:xfrm>
-          <a:off x="457200" y="1193800"/>
+          <a:off x="457200" y="1166099"/>
           <a:ext cx="8229600" cy="3390900"/>
         </p:xfrm>
         <a:graphic>
@@ -12275,7 +12275,7 @@
           </p:nvPr>
         </p:nvGraphicFramePr>
         <p:xfrm>
-          <a:off x="457200" y="1193800"/>
+          <a:off x="457200" y="1166099"/>
           <a:ext cx="8229600" cy="3390900"/>
         </p:xfrm>
         <a:graphic>
@@ -12657,7 +12657,7 @@
           </p:nvPr>
         </p:nvGraphicFramePr>
         <p:xfrm>
-          <a:off x="457200" y="1193800"/>
+          <a:off x="457200" y="1166099"/>
           <a:ext cx="8229600" cy="3390900"/>
         </p:xfrm>
         <a:graphic>
@@ -13223,8 +13223,8 @@
         </p:blipFill>
         <p:spPr bwMode="auto">
           <a:xfrm>
-            <a:off x="457200" y="2554089"/>
-            <a:ext cx="8229600" cy="584200"/>
+            <a:off x="457200" y="2592189"/>
+            <a:ext cx="8229600" cy="508000"/>
           </a:xfrm>
           <a:prstGeom prst="rect">
             <a:avLst/>
@@ -13968,7 +13968,7 @@
           </p:nvPr>
         </p:nvGraphicFramePr>
         <p:xfrm>
-          <a:off x="457200" y="1193800"/>
+          <a:off x="457200" y="1166099"/>
           <a:ext cx="8229600" cy="3390900"/>
         </p:xfrm>
         <a:graphic>
@@ -14516,7 +14516,7 @@
           </p:nvPr>
         </p:nvGraphicFramePr>
         <p:xfrm>
-          <a:off x="457200" y="1193800"/>
+          <a:off x="457200" y="1166099"/>
           <a:ext cx="8229600" cy="3390900"/>
         </p:xfrm>
         <a:graphic>
@@ -14969,7 +14969,7 @@
           </p:nvPr>
         </p:nvGraphicFramePr>
         <p:xfrm>
-          <a:off x="457200" y="1193800"/>
+          <a:off x="457200" y="1166099"/>
           <a:ext cx="8229600" cy="3390900"/>
         </p:xfrm>
         <a:graphic>
@@ -15459,7 +15459,7 @@
           </p:nvPr>
         </p:nvGraphicFramePr>
         <p:xfrm>
-          <a:off x="457200" y="1193800"/>
+          <a:off x="457200" y="1166099"/>
           <a:ext cx="8229600" cy="3390900"/>
         </p:xfrm>
         <a:graphic>
@@ -16154,7 +16154,7 @@
           </p:nvPr>
         </p:nvGraphicFramePr>
         <p:xfrm>
-          <a:off x="457200" y="1193800"/>
+          <a:off x="457200" y="1166099"/>
           <a:ext cx="8229600" cy="3390900"/>
         </p:xfrm>
         <a:graphic>
@@ -16559,8 +16559,8 @@
         </p:blipFill>
         <p:spPr bwMode="auto">
           <a:xfrm>
-            <a:off x="683251" y="1166099"/>
-            <a:ext cx="7777497" cy="3360181"/>
+            <a:off x="2129950" y="1825802"/>
+            <a:ext cx="4884099" cy="2040774"/>
           </a:xfrm>
           <a:prstGeom prst="rect">
             <a:avLst/>

--- a/Lessons/07_trees_and_ensembles/Slides/trees_and_ensembles_slides.pptx
+++ b/Lessons/07_trees_and_ensembles/Slides/trees_and_ensembles_slides.pptx
@@ -9479,8 +9479,8 @@
         </p:blipFill>
         <p:spPr bwMode="auto">
           <a:xfrm>
-            <a:off x="457200" y="2579489"/>
-            <a:ext cx="8229600" cy="533400"/>
+            <a:off x="457200" y="2554089"/>
+            <a:ext cx="8229600" cy="584200"/>
           </a:xfrm>
           <a:prstGeom prst="rect">
             <a:avLst/>
@@ -13223,8 +13223,8 @@
         </p:blipFill>
         <p:spPr bwMode="auto">
           <a:xfrm>
-            <a:off x="457200" y="2592189"/>
-            <a:ext cx="8229600" cy="508000"/>
+            <a:off x="457208" y="2598540"/>
+            <a:ext cx="8229583" cy="495299"/>
           </a:xfrm>
           <a:prstGeom prst="rect">
             <a:avLst/>
@@ -16559,8 +16559,8 @@
         </p:blipFill>
         <p:spPr bwMode="auto">
           <a:xfrm>
-            <a:off x="2129950" y="1825802"/>
-            <a:ext cx="4884099" cy="2040774"/>
+            <a:off x="2162991" y="1815411"/>
+            <a:ext cx="4818018" cy="2061556"/>
           </a:xfrm>
           <a:prstGeom prst="rect">
             <a:avLst/>
